--- a/docs/slide.pptx
+++ b/docs/slide.pptx
@@ -1997,7 +1997,7 @@
                 <a:ea typeface="Calibri" pitchFamily="34" charset="-122"/>
                 <a:cs typeface="Calibri" pitchFamily="34" charset="-120"/>
               </a:rPr>
-              <a:t>17_12523101_10123337_DuDoanDotQuy  ·  Tài liệu v2.0 (23/09/2026)</a:t>
+              <a:t>17_12523101_10123337_DuDoanDotQuy</a:t>
             </a:r>
             <a:endParaRPr lang="en-US" sz="1400" dirty="0"/>
           </a:p>
